--- a/SY2425_vs_SY2526_Comparison.pptx
+++ b/SY2425_vs_SY2526_Comparison.pptx
@@ -1251,7 +1251,7 @@
                           <a:ea typeface="Arial" pitchFamily="34" charset="-122"/>
                           <a:cs typeface="Arial" pitchFamily="34" charset="-120"/>
                         </a:rPr>
-                        <a:t>% Correct - MLL</a:t>
+                        <a:t>% Correct - MLL (SY26 only; 5 students)</a:t>
                       </a:r>
                       <a:endParaRPr lang="en-US" sz="900" dirty="0">
                         <a:latin typeface="Arial" charset="0"/>
@@ -1483,7 +1483,7 @@
                           <a:ea typeface="Arial" pitchFamily="34" charset="-122"/>
                           <a:cs typeface="Arial" pitchFamily="34" charset="-120"/>
                         </a:rPr>
-                        <a:t>45.9% to 44.4%</a:t>
+                        <a:t>44.4%</a:t>
                       </a:r>
                       <a:endParaRPr lang="en-US" sz="900" dirty="0">
                         <a:latin typeface="Arial" charset="0"/>
@@ -1498,13 +1498,13 @@
                       <a:r>
                         <a:rPr lang="en-US" sz="800" dirty="0">
                           <a:solidFill>
-                            <a:srgbClr val="D32F2F"/>
-                          </a:solidFill>
-                          <a:latin typeface="Arial" pitchFamily="34" charset="0"/>
-                          <a:ea typeface="Arial" pitchFamily="34" charset="-122"/>
-                          <a:cs typeface="Arial" pitchFamily="34" charset="-120"/>
-                        </a:rPr>
-                        <a:t>(-1.5 pts)</a:t>
+                            <a:srgbClr val="7A7A7A"/>
+                          </a:solidFill>
+                          <a:latin typeface="Arial" pitchFamily="34" charset="0"/>
+                          <a:ea typeface="Arial" pitchFamily="34" charset="-122"/>
+                          <a:cs typeface="Arial" pitchFamily="34" charset="-120"/>
+                        </a:rPr>
+                        <a:t>(100/225)</a:t>
                       </a:r>
                       <a:endParaRPr lang="en-US" sz="900" dirty="0">
                         <a:latin typeface="Arial" charset="0"/>
@@ -1747,7 +1747,7 @@
                           <a:ea typeface="Arial" pitchFamily="34" charset="-122"/>
                           <a:cs typeface="Arial" pitchFamily="34" charset="-120"/>
                         </a:rPr>
-                        <a:t>39.3% to 60.0%</a:t>
+                        <a:t>60.0%</a:t>
                       </a:r>
                       <a:endParaRPr lang="en-US" sz="900" dirty="0">
                         <a:latin typeface="Arial" charset="0"/>
@@ -1762,24 +1762,13 @@
                       <a:r>
                         <a:rPr lang="en-US" sz="800" dirty="0">
                           <a:solidFill>
-                            <a:srgbClr val="4CAF50"/>
-                          </a:solidFill>
-                          <a:latin typeface="Arial" pitchFamily="34" charset="0"/>
-                          <a:ea typeface="Arial" pitchFamily="34" charset="-122"/>
-                          <a:cs typeface="Arial" pitchFamily="34" charset="-120"/>
-                        </a:rPr>
-                        <a:t>(+20.7 pts)</a:t>
-                      </a:r>
-                      <a:r>
-                        <a:rPr lang="en-US" sz="700" dirty="0">
-                          <a:solidFill>
                             <a:srgbClr val="7A7A7A"/>
                           </a:solidFill>
                           <a:latin typeface="Arial" pitchFamily="34" charset="0"/>
                           <a:ea typeface="Arial" pitchFamily="34" charset="-122"/>
                           <a:cs typeface="Arial" pitchFamily="34" charset="-120"/>
                         </a:rPr>
-                        <a:t>  n=5</a:t>
+                        <a:t>(3/5)</a:t>
                       </a:r>
                       <a:endParaRPr lang="en-US" sz="900" dirty="0">
                         <a:latin typeface="Arial" charset="0"/>
@@ -2022,7 +2011,7 @@
                           <a:ea typeface="Arial" pitchFamily="34" charset="-122"/>
                           <a:cs typeface="Arial" pitchFamily="34" charset="-120"/>
                         </a:rPr>
-                        <a:t>42.9% to —</a:t>
+                        <a:t>—</a:t>
                       </a:r>
                       <a:endParaRPr lang="en-US" sz="900" dirty="0">
                         <a:latin typeface="Arial" charset="0"/>
@@ -2286,7 +2275,7 @@
                           <a:ea typeface="Arial" pitchFamily="34" charset="-122"/>
                           <a:cs typeface="Arial" pitchFamily="34" charset="-120"/>
                         </a:rPr>
-                        <a:t>30.4% to 50.0%</a:t>
+                        <a:t>50.0%</a:t>
                       </a:r>
                       <a:endParaRPr lang="en-US" sz="900" dirty="0">
                         <a:latin typeface="Arial" charset="0"/>
@@ -2301,24 +2290,13 @@
                       <a:r>
                         <a:rPr lang="en-US" sz="800" dirty="0">
                           <a:solidFill>
-                            <a:srgbClr val="4CAF50"/>
-                          </a:solidFill>
-                          <a:latin typeface="Arial" pitchFamily="34" charset="0"/>
-                          <a:ea typeface="Arial" pitchFamily="34" charset="-122"/>
-                          <a:cs typeface="Arial" pitchFamily="34" charset="-120"/>
-                        </a:rPr>
-                        <a:t>(+19.6 pts)</a:t>
-                      </a:r>
-                      <a:r>
-                        <a:rPr lang="en-US" sz="700" dirty="0">
-                          <a:solidFill>
                             <a:srgbClr val="7A7A7A"/>
                           </a:solidFill>
                           <a:latin typeface="Arial" pitchFamily="34" charset="0"/>
                           <a:ea typeface="Arial" pitchFamily="34" charset="-122"/>
                           <a:cs typeface="Arial" pitchFamily="34" charset="-120"/>
                         </a:rPr>
-                        <a:t>  n=10</a:t>
+                        <a:t>(5/10)</a:t>
                       </a:r>
                       <a:endParaRPr lang="en-US" sz="900" dirty="0">
                         <a:latin typeface="Arial" charset="0"/>
@@ -2579,7 +2557,7 @@
                           <a:ea typeface="Arial" pitchFamily="34" charset="-122"/>
                           <a:cs typeface="Arial" pitchFamily="34" charset="-120"/>
                         </a:rPr>
-                        <a:t>% Correct - MLL</a:t>
+                        <a:t>% Correct - MLL (SY26 only; 5 students)</a:t>
                       </a:r>
                       <a:endParaRPr lang="en-US" sz="900" dirty="0">
                         <a:latin typeface="Arial" charset="0"/>
@@ -2811,7 +2789,7 @@
                           <a:ea typeface="Arial" pitchFamily="34" charset="-122"/>
                           <a:cs typeface="Arial" pitchFamily="34" charset="-120"/>
                         </a:rPr>
-                        <a:t>45.9% to 44.4%</a:t>
+                        <a:t>44.4%</a:t>
                       </a:r>
                       <a:endParaRPr lang="en-US" sz="900" dirty="0">
                         <a:latin typeface="Arial" charset="0"/>
@@ -2826,13 +2804,13 @@
                       <a:r>
                         <a:rPr lang="en-US" sz="800" dirty="0">
                           <a:solidFill>
-                            <a:srgbClr val="D32F2F"/>
-                          </a:solidFill>
-                          <a:latin typeface="Arial" pitchFamily="34" charset="0"/>
-                          <a:ea typeface="Arial" pitchFamily="34" charset="-122"/>
-                          <a:cs typeface="Arial" pitchFamily="34" charset="-120"/>
-                        </a:rPr>
-                        <a:t>(-1.5 pts)</a:t>
+                            <a:srgbClr val="7A7A7A"/>
+                          </a:solidFill>
+                          <a:latin typeface="Arial" pitchFamily="34" charset="0"/>
+                          <a:ea typeface="Arial" pitchFamily="34" charset="-122"/>
+                          <a:cs typeface="Arial" pitchFamily="34" charset="-120"/>
+                        </a:rPr>
+                        <a:t>(100/225)</a:t>
                       </a:r>
                       <a:endParaRPr lang="en-US" sz="900" dirty="0">
                         <a:latin typeface="Arial" charset="0"/>
@@ -3075,7 +3053,7 @@
                           <a:ea typeface="Arial" pitchFamily="34" charset="-122"/>
                           <a:cs typeface="Arial" pitchFamily="34" charset="-120"/>
                         </a:rPr>
-                        <a:t>42.6% to 32.0%</a:t>
+                        <a:t>32.0%</a:t>
                       </a:r>
                       <a:endParaRPr lang="en-US" sz="900" dirty="0">
                         <a:latin typeface="Arial" charset="0"/>
@@ -3090,13 +3068,13 @@
                       <a:r>
                         <a:rPr lang="en-US" sz="800" dirty="0">
                           <a:solidFill>
-                            <a:srgbClr val="D32F2F"/>
-                          </a:solidFill>
-                          <a:latin typeface="Arial" pitchFamily="34" charset="0"/>
-                          <a:ea typeface="Arial" pitchFamily="34" charset="-122"/>
-                          <a:cs typeface="Arial" pitchFamily="34" charset="-120"/>
-                        </a:rPr>
-                        <a:t>(-10.6 pts)</a:t>
+                            <a:srgbClr val="7A7A7A"/>
+                          </a:solidFill>
+                          <a:latin typeface="Arial" pitchFamily="34" charset="0"/>
+                          <a:ea typeface="Arial" pitchFamily="34" charset="-122"/>
+                          <a:cs typeface="Arial" pitchFamily="34" charset="-120"/>
+                        </a:rPr>
+                        <a:t>(8/25)</a:t>
                       </a:r>
                       <a:endParaRPr lang="en-US" sz="900" dirty="0">
                         <a:latin typeface="Arial" charset="0"/>
@@ -3339,7 +3317,7 @@
                           <a:ea typeface="Arial" pitchFamily="34" charset="-122"/>
                           <a:cs typeface="Arial" pitchFamily="34" charset="-120"/>
                         </a:rPr>
-                        <a:t>47.8% to 100.0%</a:t>
+                        <a:t>100.0%</a:t>
                       </a:r>
                       <a:endParaRPr lang="en-US" sz="900" dirty="0">
                         <a:latin typeface="Arial" charset="0"/>
@@ -3354,24 +3332,13 @@
                       <a:r>
                         <a:rPr lang="en-US" sz="800" dirty="0">
                           <a:solidFill>
-                            <a:srgbClr val="4CAF50"/>
-                          </a:solidFill>
-                          <a:latin typeface="Arial" pitchFamily="34" charset="0"/>
-                          <a:ea typeface="Arial" pitchFamily="34" charset="-122"/>
-                          <a:cs typeface="Arial" pitchFamily="34" charset="-120"/>
-                        </a:rPr>
-                        <a:t>(+52.2 pts)</a:t>
-                      </a:r>
-                      <a:r>
-                        <a:rPr lang="en-US" sz="700" dirty="0">
-                          <a:solidFill>
                             <a:srgbClr val="7A7A7A"/>
                           </a:solidFill>
                           <a:latin typeface="Arial" pitchFamily="34" charset="0"/>
                           <a:ea typeface="Arial" pitchFamily="34" charset="-122"/>
                           <a:cs typeface="Arial" pitchFamily="34" charset="-120"/>
                         </a:rPr>
-                        <a:t>  n=5</a:t>
+                        <a:t>(5/5; one Low-difficulty item each)</a:t>
                       </a:r>
                       <a:endParaRPr lang="en-US" sz="900" dirty="0">
                         <a:latin typeface="Arial" charset="0"/>
@@ -3614,7 +3581,7 @@
                           <a:ea typeface="Arial" pitchFamily="34" charset="-122"/>
                           <a:cs typeface="Arial" pitchFamily="34" charset="-120"/>
                         </a:rPr>
-                        <a:t>41.8% to 20.0%</a:t>
+                        <a:t>20.0%</a:t>
                       </a:r>
                       <a:endParaRPr lang="en-US" sz="900" dirty="0">
                         <a:latin typeface="Arial" charset="0"/>
@@ -3629,13 +3596,13 @@
                       <a:r>
                         <a:rPr lang="en-US" sz="800" dirty="0">
                           <a:solidFill>
-                            <a:srgbClr val="D32F2F"/>
-                          </a:solidFill>
-                          <a:latin typeface="Arial" pitchFamily="34" charset="0"/>
-                          <a:ea typeface="Arial" pitchFamily="34" charset="-122"/>
-                          <a:cs typeface="Arial" pitchFamily="34" charset="-120"/>
-                        </a:rPr>
-                        <a:t>(-21.8 pts)</a:t>
+                            <a:srgbClr val="7A7A7A"/>
+                          </a:solidFill>
+                          <a:latin typeface="Arial" pitchFamily="34" charset="0"/>
+                          <a:ea typeface="Arial" pitchFamily="34" charset="-122"/>
+                          <a:cs typeface="Arial" pitchFamily="34" charset="-120"/>
+                        </a:rPr>
+                        <a:t>(2/10)</a:t>
                       </a:r>
                       <a:endParaRPr lang="en-US" sz="900" dirty="0">
                         <a:latin typeface="Arial" charset="0"/>
@@ -3703,7 +3670,7 @@
                 <a:ea typeface="Arial" pitchFamily="34" charset="-122"/>
                 <a:cs typeface="Arial" pitchFamily="34" charset="-120"/>
               </a:rPr>
-              <a:t>Menchville HS only. Values are % of item responses answered correctly; SY2425 limited to the 2024-standards test forms so SOL codes match SY2526. n = SY2526 MLL responses where fewer than 10.</a:t>
+              <a:t>Menchville HS only. Values are % of item responses answered correctly; SY2425 limited to the 2024-standards test forms so SOL codes match SY2526. The district-provided SDBQ for SY2526 reflects five MLL students (49 in SY2425), so MLL is shown as the SY2526 percent with correct/total responses rather than as a year-over-year change.</a:t>
             </a:r>
             <a:endParaRPr lang="en-US" sz="700" dirty="0"/>
           </a:p>
@@ -3789,11 +3756,11 @@
         <p:spPr>
           <a:xfrm>
             <a:off x="457200" y="914400"/>
-            <a:ext cx="8229600" cy="1417320"/>
+            <a:ext cx="8229600" cy="1325880"/>
           </a:xfrm>
           <a:prstGeom prst="roundRect">
             <a:avLst>
-              <a:gd name="adj" fmla="val 7742"/>
+              <a:gd name="adj" fmla="val 8276"/>
             </a:avLst>
           </a:prstGeom>
           <a:solidFill>
@@ -3811,7 +3778,7 @@
         <p:spPr>
           <a:xfrm>
             <a:off x="640080" y="987552"/>
-            <a:ext cx="7863840" cy="1280160"/>
+            <a:ext cx="7863840" cy="1188720"/>
           </a:xfrm>
           <a:prstGeom prst="rect">
             <a:avLst/>
@@ -3881,7 +3848,7 @@
                 <a:ea typeface="Arial" pitchFamily="34" charset="-122"/>
                 <a:cs typeface="Arial" pitchFamily="34" charset="-120"/>
               </a:rPr>
-              <a:t>Total % Correct (SY25 to SY26): All students -1.8, SWD +0.4, MLL -1.5</a:t>
+              <a:t>Total % Correct (SY25 to SY26): All students -1.8, SWD +0.4 (MLL not compared; see below)</a:t>
             </a:r>
             <a:endParaRPr lang="en-US" sz="1300" dirty="0"/>
           </a:p>
@@ -3967,7 +3934,7 @@
                 <a:ea typeface="Arial" pitchFamily="34" charset="-122"/>
                 <a:cs typeface="Arial" pitchFamily="34" charset="-120"/>
               </a:rPr>
-              <a:t>8 gains, 14 declines</a:t>
+              <a:t>5 students tested in SY26 (49 in SY25); too few to compare year over year</a:t>
             </a:r>
             <a:endParaRPr lang="en-US" sz="1300" dirty="0"/>
           </a:p>
@@ -3981,12 +3948,12 @@
         </p:nvSpPr>
         <p:spPr>
           <a:xfrm>
-            <a:off x="457200" y="2423160"/>
-            <a:ext cx="8229600" cy="1325880"/>
+            <a:off x="457200" y="2331720"/>
+            <a:ext cx="8229600" cy="1645920"/>
           </a:xfrm>
           <a:prstGeom prst="roundRect">
             <a:avLst>
-              <a:gd name="adj" fmla="val 8276"/>
+              <a:gd name="adj" fmla="val 6667"/>
             </a:avLst>
           </a:prstGeom>
           <a:solidFill>
@@ -4003,8 +3970,8 @@
         </p:nvSpPr>
         <p:spPr>
           <a:xfrm>
-            <a:off x="640080" y="2496312"/>
-            <a:ext cx="7863840" cy="1188720"/>
+            <a:off x="640080" y="2404872"/>
+            <a:ext cx="7863840" cy="1508760"/>
           </a:xfrm>
           <a:prstGeom prst="rect">
             <a:avLst/>
@@ -4062,7 +4029,7 @@
                 <a:ea typeface="Arial" pitchFamily="34" charset="-122"/>
                 <a:cs typeface="Arial" pitchFamily="34" charset="-120"/>
               </a:rPr>
-              <a:t>SWD is the only population with net improvement</a:t>
+              <a:t>SWD shows net improvement</a:t>
             </a:r>
             <a:r>
               <a:rPr lang="en-US" sz="1050" dirty="0">
@@ -4164,6 +4131,17 @@
               <a:buAutoNum type="arabicPeriod" startAt="1"/>
             </a:pPr>
             <a:r>
+              <a:rPr lang="en-US" sz="1050" dirty="0">
+                <a:solidFill>
+                  <a:srgbClr val="333333"/>
+                </a:solidFill>
+                <a:latin typeface="Arial" pitchFamily="34" charset="0"/>
+                <a:ea typeface="Arial" pitchFamily="34" charset="-122"/>
+                <a:cs typeface="Arial" pitchFamily="34" charset="-120"/>
+              </a:rPr>
+              <a:t>The district-provided SDBQ for SY2526 reflects only five </a:t>
+            </a:r>
+            <a:r>
               <a:rPr lang="en-US" sz="1050" b="1" dirty="0">
                 <a:solidFill>
                   <a:srgbClr val="333333"/>
@@ -4183,7 +4161,7 @@
                 <a:ea typeface="Arial" pitchFamily="34" charset="-122"/>
                 <a:cs typeface="Arial" pitchFamily="34" charset="-120"/>
               </a:rPr>
-              <a:t> remains our most vulnerable population (fewer gains, more declines, and the largest overall drop)</a:t>
+              <a:t> students who took the assessment at MHS. With a group this small, MLL results (which fall below the school on each priority standard) are best read as individual student data rather than as a trend</a:t>
             </a:r>
             <a:endParaRPr lang="en-US" sz="1300" dirty="0"/>
           </a:p>
@@ -4197,12 +4175,12 @@
         </p:nvSpPr>
         <p:spPr>
           <a:xfrm>
-            <a:off x="457200" y="3840480"/>
-            <a:ext cx="8229600" cy="1143000"/>
+            <a:off x="457200" y="4069080"/>
+            <a:ext cx="8229600" cy="914400"/>
           </a:xfrm>
           <a:prstGeom prst="roundRect">
             <a:avLst>
-              <a:gd name="adj" fmla="val 9600"/>
+              <a:gd name="adj" fmla="val 12000"/>
             </a:avLst>
           </a:prstGeom>
           <a:solidFill>
@@ -4219,8 +4197,8 @@
         </p:nvSpPr>
         <p:spPr>
           <a:xfrm>
-            <a:off x="640080" y="3913632"/>
-            <a:ext cx="7863840" cy="1005840"/>
+            <a:off x="640080" y="4142232"/>
+            <a:ext cx="7863840" cy="822960"/>
           </a:xfrm>
           <a:prstGeom prst="rect">
             <a:avLst/>
@@ -4268,7 +4246,7 @@
                 <a:ea typeface="Arial" pitchFamily="34" charset="-122"/>
                 <a:cs typeface="Arial" pitchFamily="34" charset="-120"/>
               </a:rPr>
-              <a:t>10.RVF.1.D: </a:t>
+              <a:t>11.RVN.1.D: </a:t>
             </a:r>
             <a:r>
               <a:rPr lang="en-US" sz="1050" dirty="0">
@@ -4279,7 +4257,7 @@
                 <a:ea typeface="Arial" pitchFamily="34" charset="-122"/>
                 <a:cs typeface="Arial" pitchFamily="34" charset="-120"/>
               </a:rPr>
-              <a:t>All Students -1.7, but MLL +40.0 (population-specific gain; MLL n=5)</a:t>
+              <a:t>All Students flat (0.0), but SWD +34.6 (strong SWD gain masked overall; SWD n=18)</a:t>
             </a:r>
             <a:endParaRPr lang="en-US" sz="1300" dirty="0"/>
           </a:p>
@@ -4300,7 +4278,7 @@
                 <a:ea typeface="Arial" pitchFamily="34" charset="-122"/>
                 <a:cs typeface="Arial" pitchFamily="34" charset="-120"/>
               </a:rPr>
-              <a:t>11.RI.2.C: </a:t>
+              <a:t>9.RI.2.B: </a:t>
             </a:r>
             <a:r>
               <a:rPr lang="en-US" sz="1050" dirty="0">
@@ -4311,7 +4289,7 @@
                 <a:ea typeface="Arial" pitchFamily="34" charset="-122"/>
                 <a:cs typeface="Arial" pitchFamily="34" charset="-120"/>
               </a:rPr>
-              <a:t>All Students -36.1, SWD -32.8, but MLL +52.2 (wildly inconsistent; MLL n=5)</a:t>
+              <a:t>All Students -9.9, but SWD +22.2 (SWD n=10)</a:t>
             </a:r>
             <a:endParaRPr lang="en-US" sz="1300" dirty="0"/>
           </a:p>
@@ -4332,7 +4310,7 @@
                 <a:ea typeface="Arial" pitchFamily="34" charset="-122"/>
                 <a:cs typeface="Arial" pitchFamily="34" charset="-120"/>
               </a:rPr>
-              <a:t>11.RVN.1.D: </a:t>
+              <a:t>10.RI.1.B: </a:t>
             </a:r>
             <a:r>
               <a:rPr lang="en-US" sz="1050" dirty="0">
@@ -4343,7 +4321,7 @@
                 <a:ea typeface="Arial" pitchFamily="34" charset="-122"/>
                 <a:cs typeface="Arial" pitchFamily="34" charset="-120"/>
               </a:rPr>
-              <a:t>All Students flat (0.0), but SWD +34.6 (strong SWD gain masked overall; SWD n=18)</a:t>
+              <a:t>All Students +8.2, but SWD +23.2 (SWD n=27)</a:t>
             </a:r>
             <a:endParaRPr lang="en-US" sz="1300" dirty="0"/>
           </a:p>
@@ -4382,7 +4360,7 @@
                 <a:ea typeface="Arial" pitchFamily="34" charset="-122"/>
                 <a:cs typeface="Arial" pitchFamily="34" charset="-120"/>
               </a:rPr>
-              <a:t>Menchville HS only; 39 SOLs common to both years; a strand counts as a gain or decline on any nonzero change. 7 of the 27 All-Students declines fall on SOLs with fewer than 5 SY2526 responses.</a:t>
+              <a:t>Menchville HS only; 39 SOLs common to both years; any nonzero change counts as a gain or decline. 7 of the 27 All-Students declines are on SOLs with fewer than 5 SY2526 responses. MLL counts omitted (five students).</a:t>
             </a:r>
             <a:endParaRPr lang="en-US" sz="650" dirty="0"/>
           </a:p>

--- a/SY2425_vs_SY2526_Comparison.pptx
+++ b/SY2425_vs_SY2526_Comparison.pptx
@@ -3756,11 +3756,11 @@
         <p:spPr>
           <a:xfrm>
             <a:off x="457200" y="914400"/>
-            <a:ext cx="8229600" cy="1325880"/>
+            <a:ext cx="8229600" cy="1536192"/>
           </a:xfrm>
           <a:prstGeom prst="roundRect">
             <a:avLst>
-              <a:gd name="adj" fmla="val 8276"/>
+              <a:gd name="adj" fmla="val 7143"/>
             </a:avLst>
           </a:prstGeom>
           <a:solidFill>
@@ -3778,7 +3778,7 @@
         <p:spPr>
           <a:xfrm>
             <a:off x="640080" y="987552"/>
-            <a:ext cx="7863840" cy="1188720"/>
+            <a:ext cx="7863840" cy="1399032"/>
           </a:xfrm>
           <a:prstGeom prst="rect">
             <a:avLst/>
@@ -3818,7 +3818,7 @@
               <a:buChar char="•"/>
             </a:pPr>
             <a:r>
-              <a:rPr lang="en-US" sz="1050" b="1" dirty="0">
+              <a:rPr lang="en-US" sz="1000" b="1" dirty="0">
                 <a:solidFill>
                   <a:srgbClr val="333333"/>
                 </a:solidFill>
@@ -3840,7 +3840,7 @@
               <a:buAutoNum type="arabicPeriod" startAt="1"/>
             </a:pPr>
             <a:r>
-              <a:rPr lang="en-US" sz="1050" dirty="0">
+              <a:rPr lang="en-US" sz="1000" dirty="0">
                 <a:solidFill>
                   <a:srgbClr val="333333"/>
                 </a:solidFill>
@@ -3862,7 +3862,7 @@
               <a:buAutoNum type="arabicPeriod" startAt="1"/>
             </a:pPr>
             <a:r>
-              <a:rPr lang="en-US" sz="1050" dirty="0">
+              <a:rPr lang="en-US" sz="1000" dirty="0">
                 <a:solidFill>
                   <a:srgbClr val="333333"/>
                 </a:solidFill>
@@ -3883,7 +3883,7 @@
               <a:buChar char="•"/>
             </a:pPr>
             <a:r>
-              <a:rPr lang="en-US" sz="1050" b="1" dirty="0">
+              <a:rPr lang="en-US" sz="1000" b="1" dirty="0">
                 <a:solidFill>
                   <a:srgbClr val="333333"/>
                 </a:solidFill>
@@ -3894,7 +3894,7 @@
               <a:t>SWD: </a:t>
             </a:r>
             <a:r>
-              <a:rPr lang="en-US" sz="1050" dirty="0">
+              <a:rPr lang="en-US" sz="1000" dirty="0">
                 <a:solidFill>
                   <a:srgbClr val="333333"/>
                 </a:solidFill>
@@ -3915,7 +3915,7 @@
               <a:buChar char="•"/>
             </a:pPr>
             <a:r>
-              <a:rPr lang="en-US" sz="1050" b="1" dirty="0">
+              <a:rPr lang="en-US" sz="1000" b="1" dirty="0">
                 <a:solidFill>
                   <a:srgbClr val="333333"/>
                 </a:solidFill>
@@ -3926,7 +3926,7 @@
               <a:t>ELL/MLL: </a:t>
             </a:r>
             <a:r>
-              <a:rPr lang="en-US" sz="1050" dirty="0">
+              <a:rPr lang="en-US" sz="1000" dirty="0">
                 <a:solidFill>
                   <a:srgbClr val="333333"/>
                 </a:solidFill>
@@ -3935,6 +3935,38 @@
                 <a:cs typeface="Arial" pitchFamily="34" charset="-120"/>
               </a:rPr>
               <a:t>5 students tested in SY26 (49 in SY25); too few to compare year over year</a:t>
+            </a:r>
+            <a:endParaRPr lang="en-US" sz="1300" dirty="0"/>
+          </a:p>
+          <a:p>
+            <a:pPr marL="342900" indent="-342900">
+              <a:spcAft>
+                <a:spcPts val="300"/>
+              </a:spcAft>
+              <a:buSzPct val="100000"/>
+              <a:buChar char="•"/>
+            </a:pPr>
+            <a:r>
+              <a:rPr lang="en-US" sz="1000" b="1" dirty="0">
+                <a:solidFill>
+                  <a:srgbClr val="333333"/>
+                </a:solidFill>
+                <a:latin typeface="Arial" pitchFamily="34" charset="0"/>
+                <a:ea typeface="Arial" pitchFamily="34" charset="-122"/>
+                <a:cs typeface="Arial" pitchFamily="34" charset="-120"/>
+              </a:rPr>
+              <a:t>Bloom’s level (by item verb): </a:t>
+            </a:r>
+            <a:r>
+              <a:rPr lang="en-US" sz="1000" dirty="0">
+                <a:solidFill>
+                  <a:srgbClr val="333333"/>
+                </a:solidFill>
+                <a:latin typeface="Arial" pitchFamily="34" charset="0"/>
+                <a:ea typeface="Arial" pitchFamily="34" charset="-122"/>
+                <a:cs typeface="Arial" pitchFamily="34" charset="-120"/>
+              </a:rPr>
+              <a:t>evaluate 64% → 55% (-9); analyze 63% → 62% (about steady); understand and apply about flat</a:t>
             </a:r>
             <a:endParaRPr lang="en-US" sz="1300" dirty="0"/>
           </a:p>
@@ -3948,12 +3980,12 @@
         </p:nvSpPr>
         <p:spPr>
           <a:xfrm>
-            <a:off x="457200" y="2331720"/>
-            <a:ext cx="8229600" cy="1645920"/>
+            <a:off x="457200" y="2542032"/>
+            <a:ext cx="8229600" cy="1280160"/>
           </a:xfrm>
           <a:prstGeom prst="roundRect">
             <a:avLst>
-              <a:gd name="adj" fmla="val 6667"/>
+              <a:gd name="adj" fmla="val 8571"/>
             </a:avLst>
           </a:prstGeom>
           <a:solidFill>
@@ -3970,8 +4002,8 @@
         </p:nvSpPr>
         <p:spPr>
           <a:xfrm>
-            <a:off x="640080" y="2404872"/>
-            <a:ext cx="7863840" cy="1508760"/>
+            <a:off x="640080" y="2615184"/>
+            <a:ext cx="7863840" cy="1152144"/>
           </a:xfrm>
           <a:prstGeom prst="rect">
             <a:avLst/>
@@ -4010,7 +4042,7 @@
               <a:buNone/>
             </a:pPr>
             <a:r>
-              <a:rPr lang="en-US" sz="1050" dirty="0">
+              <a:rPr lang="en-US" sz="1000" dirty="0">
                 <a:solidFill>
                   <a:srgbClr val="333333"/>
                 </a:solidFill>
@@ -4021,7 +4053,7 @@
               <a:t>While All Students show net decline (11 gains vs 27 declines), </a:t>
             </a:r>
             <a:r>
-              <a:rPr lang="en-US" sz="1050" b="1" dirty="0">
+              <a:rPr lang="en-US" sz="1000" b="1" dirty="0">
                 <a:solidFill>
                   <a:srgbClr val="333333"/>
                 </a:solidFill>
@@ -4032,7 +4064,7 @@
               <a:t>SWD shows net improvement</a:t>
             </a:r>
             <a:r>
-              <a:rPr lang="en-US" sz="1050" dirty="0">
+              <a:rPr lang="en-US" sz="1000" dirty="0">
                 <a:solidFill>
                   <a:srgbClr val="333333"/>
                 </a:solidFill>
@@ -4054,7 +4086,7 @@
               <a:buAutoNum type="arabicPeriod" startAt="1"/>
             </a:pPr>
             <a:r>
-              <a:rPr lang="en-US" sz="1050" b="1" dirty="0">
+              <a:rPr lang="en-US" sz="1000" b="1" dirty="0">
                 <a:solidFill>
                   <a:srgbClr val="333333"/>
                 </a:solidFill>
@@ -4065,7 +4097,7 @@
               <a:t>SWD</a:t>
             </a:r>
             <a:r>
-              <a:rPr lang="en-US" sz="1050" dirty="0">
+              <a:rPr lang="en-US" sz="1000" dirty="0">
                 <a:solidFill>
                   <a:srgbClr val="333333"/>
                 </a:solidFill>
@@ -4087,7 +4119,7 @@
               <a:buAutoNum type="arabicPeriod" startAt="1"/>
             </a:pPr>
             <a:r>
-              <a:rPr lang="en-US" sz="1050" dirty="0">
+              <a:rPr lang="en-US" sz="1000" dirty="0">
                 <a:solidFill>
                   <a:srgbClr val="333333"/>
                 </a:solidFill>
@@ -4098,7 +4130,7 @@
               <a:t>The </a:t>
             </a:r>
             <a:r>
-              <a:rPr lang="en-US" sz="1050" b="1" dirty="0">
+              <a:rPr lang="en-US" sz="1000" b="1" dirty="0">
                 <a:solidFill>
                   <a:srgbClr val="333333"/>
                 </a:solidFill>
@@ -4109,7 +4141,7 @@
               <a:t>school-wide</a:t>
             </a:r>
             <a:r>
-              <a:rPr lang="en-US" sz="1050" dirty="0">
+              <a:rPr lang="en-US" sz="1000" dirty="0">
                 <a:solidFill>
                   <a:srgbClr val="333333"/>
                 </a:solidFill>
@@ -4131,7 +4163,7 @@
               <a:buAutoNum type="arabicPeriod" startAt="1"/>
             </a:pPr>
             <a:r>
-              <a:rPr lang="en-US" sz="1050" dirty="0">
+              <a:rPr lang="en-US" sz="1000" dirty="0">
                 <a:solidFill>
                   <a:srgbClr val="333333"/>
                 </a:solidFill>
@@ -4142,7 +4174,7 @@
               <a:t>The district-provided SDBQ for SY2526 reflects only five </a:t>
             </a:r>
             <a:r>
-              <a:rPr lang="en-US" sz="1050" b="1" dirty="0">
+              <a:rPr lang="en-US" sz="1000" b="1" dirty="0">
                 <a:solidFill>
                   <a:srgbClr val="333333"/>
                 </a:solidFill>
@@ -4153,7 +4185,7 @@
               <a:t>MLL</a:t>
             </a:r>
             <a:r>
-              <a:rPr lang="en-US" sz="1050" dirty="0">
+              <a:rPr lang="en-US" sz="1000" dirty="0">
                 <a:solidFill>
                   <a:srgbClr val="333333"/>
                 </a:solidFill>
@@ -4175,12 +4207,12 @@
         </p:nvSpPr>
         <p:spPr>
           <a:xfrm>
-            <a:off x="457200" y="4069080"/>
-            <a:ext cx="8229600" cy="914400"/>
+            <a:off x="457200" y="3913632"/>
+            <a:ext cx="8229600" cy="1024128"/>
           </a:xfrm>
           <a:prstGeom prst="roundRect">
             <a:avLst>
-              <a:gd name="adj" fmla="val 12000"/>
+              <a:gd name="adj" fmla="val 10714"/>
             </a:avLst>
           </a:prstGeom>
           <a:solidFill>
@@ -4197,8 +4229,8 @@
         </p:nvSpPr>
         <p:spPr>
           <a:xfrm>
-            <a:off x="640080" y="4142232"/>
-            <a:ext cx="7863840" cy="822960"/>
+            <a:off x="640080" y="3986784"/>
+            <a:ext cx="7863840" cy="896112"/>
           </a:xfrm>
           <a:prstGeom prst="rect">
             <a:avLst/>
@@ -4238,7 +4270,7 @@
               <a:buChar char="•"/>
             </a:pPr>
             <a:r>
-              <a:rPr lang="en-US" sz="1050" b="1" dirty="0">
+              <a:rPr lang="en-US" sz="1000" b="1" dirty="0">
                 <a:solidFill>
                   <a:srgbClr val="333333"/>
                 </a:solidFill>
@@ -4249,7 +4281,7 @@
               <a:t>11.RVN.1.D: </a:t>
             </a:r>
             <a:r>
-              <a:rPr lang="en-US" sz="1050" dirty="0">
+              <a:rPr lang="en-US" sz="1000" dirty="0">
                 <a:solidFill>
                   <a:srgbClr val="333333"/>
                 </a:solidFill>
@@ -4270,7 +4302,7 @@
               <a:buChar char="•"/>
             </a:pPr>
             <a:r>
-              <a:rPr lang="en-US" sz="1050" b="1" dirty="0">
+              <a:rPr lang="en-US" sz="1000" b="1" dirty="0">
                 <a:solidFill>
                   <a:srgbClr val="333333"/>
                 </a:solidFill>
@@ -4281,7 +4313,7 @@
               <a:t>9.RI.2.B: </a:t>
             </a:r>
             <a:r>
-              <a:rPr lang="en-US" sz="1050" dirty="0">
+              <a:rPr lang="en-US" sz="1000" dirty="0">
                 <a:solidFill>
                   <a:srgbClr val="333333"/>
                 </a:solidFill>
@@ -4302,7 +4334,7 @@
               <a:buChar char="•"/>
             </a:pPr>
             <a:r>
-              <a:rPr lang="en-US" sz="1050" b="1" dirty="0">
+              <a:rPr lang="en-US" sz="1000" b="1" dirty="0">
                 <a:solidFill>
                   <a:srgbClr val="333333"/>
                 </a:solidFill>
@@ -4313,7 +4345,7 @@
               <a:t>10.RI.1.B: </a:t>
             </a:r>
             <a:r>
-              <a:rPr lang="en-US" sz="1050" dirty="0">
+              <a:rPr lang="en-US" sz="1000" dirty="0">
                 <a:solidFill>
                   <a:srgbClr val="333333"/>
                 </a:solidFill>
